--- a/assets/pptx/catalog-469.pptx
+++ b/assets/pptx/catalog-469.pptx
@@ -3249,7 +3249,7 @@
                 <a:ea typeface="Ebrima"/>
                 <a:cs typeface="Ebrima"/>
               </a:rPr>
-              <a:t>ያገኘኝ ሁሉ እንዳይገድለኝ (የኢየሱስ ደም አለብኝ)</a:t>
+              <a:t>ያገኘኝ ሁሉ እንዳይገድለኝ የኢየሱስ ደም አለብኝ</a:t>
             </a:r>
           </a:p>
           <a:p>
@@ -3267,7 +3267,7 @@
                 <a:ea typeface="Ebrima"/>
                 <a:cs typeface="Ebrima"/>
               </a:rPr>
-              <a:t>ያገኘኝ በሙሉ እንዳይነካኝ (የኢየሱስ ደም አለብኝ) (2x)</a:t>
+              <a:t>ያገኘኝ በሙሉ እንዳይነካኝ የኢየሱስ ደም አለብኝ 2x</a:t>
             </a:r>
           </a:p>
           <a:p>
@@ -3285,7 +3285,7 @@
                 <a:ea typeface="Ebrima"/>
                 <a:cs typeface="Ebrima"/>
               </a:rPr>
-              <a:t>ያገኘኝ በሙሉ እንዳይገድለኝ (የኢየሱስ ደም አለብኝ)</a:t>
+              <a:t>ያገኘኝ በሙሉ እንዳይገድለኝ የኢየሱስ ደም አለብኝ</a:t>
             </a:r>
           </a:p>
         </p:txBody>
@@ -3509,7 +3509,7 @@
                 <a:ea typeface="Ebrima"/>
                 <a:cs typeface="Ebrima"/>
               </a:rPr>
-              <a:t>ምልክት አለኝ (4x) ልዩነት አለኝ (4x)</a:t>
+              <a:t>ምልክት አለኝ 4x ልዩነት አለኝ 4x</a:t>
             </a:r>
           </a:p>
         </p:txBody>
@@ -3697,7 +3697,7 @@
                 <a:ea typeface="Ebrima"/>
                 <a:cs typeface="Ebrima"/>
               </a:rPr>
-              <a:t>ያገኘኝ ሁሉ እንዳይገድለኝ (የኢየሱስ ደም አለብኝ)</a:t>
+              <a:t>ያገኘኝ ሁሉ እንዳይገድለኝ የኢየሱስ ደም አለብኝ</a:t>
             </a:r>
           </a:p>
           <a:p>
@@ -3715,7 +3715,7 @@
                 <a:ea typeface="Ebrima"/>
                 <a:cs typeface="Ebrima"/>
               </a:rPr>
-              <a:t>ያገኘኝ በሙሉ እንዳይነካኝ (የኢየሱስ ደም አለብኝ) (2x)</a:t>
+              <a:t>ያገኘኝ በሙሉ እንዳይነካኝ የኢየሱስ ደም አለብኝ 2x</a:t>
             </a:r>
           </a:p>
           <a:p>
@@ -3733,7 +3733,7 @@
                 <a:ea typeface="Ebrima"/>
                 <a:cs typeface="Ebrima"/>
               </a:rPr>
-              <a:t>ያገኘኝ በሙሉ እንዳይገድለኝ (የኢየሱስ ደም አለብኝ)</a:t>
+              <a:t>ያገኘኝ በሙሉ እንዳይገድለኝ የኢየሱስ ደም አለብኝ</a:t>
             </a:r>
           </a:p>
         </p:txBody>
@@ -3957,7 +3957,7 @@
                 <a:ea typeface="Ebrima"/>
                 <a:cs typeface="Ebrima"/>
               </a:rPr>
-              <a:t>ምልክት አለኝ (4x) ልዩነት አለኝ (4x)</a:t>
+              <a:t>ምልክት አለኝ 4x ልዩነት አለኝ 4x</a:t>
             </a:r>
           </a:p>
         </p:txBody>
@@ -4024,7 +4024,7 @@
                 <a:ea typeface="Ebrima"/>
                 <a:cs typeface="Ebrima"/>
               </a:rPr>
-              <a:t>ያገኘኝ ሁሉ እንዳይገድለኝ (የኢየሱስ ደም አለብኝ)</a:t>
+              <a:t>ያገኘኝ ሁሉ እንዳይገድለኝ የኢየሱስ ደም አለብኝ</a:t>
             </a:r>
           </a:p>
           <a:p>
@@ -4042,7 +4042,7 @@
                 <a:ea typeface="Ebrima"/>
                 <a:cs typeface="Ebrima"/>
               </a:rPr>
-              <a:t>ያገኘኝ በሙሉ እንዳይነካኝ (የኢየሱስ ደም አለብኝ) (2x)</a:t>
+              <a:t>ያገኘኝ በሙሉ እንዳይነካኝ የኢየሱስ ደም አለብኝ 2x</a:t>
             </a:r>
           </a:p>
           <a:p>
@@ -4060,7 +4060,7 @@
                 <a:ea typeface="Ebrima"/>
                 <a:cs typeface="Ebrima"/>
               </a:rPr>
-              <a:t>ያገኘኝ በሙሉ እንዳይገድለኝ (የኢየሱስ ደም አለብኝ)</a:t>
+              <a:t>ያገኘኝ በሙሉ እንዳይገድለኝ የኢየሱስ ደም አለብኝ</a:t>
             </a:r>
           </a:p>
         </p:txBody>
@@ -4163,7 +4163,7 @@
                 <a:ea typeface="Ebrima"/>
                 <a:cs typeface="Ebrima"/>
               </a:rPr>
-              <a:t>ምልክት አለኝ (4x) ልዩነት አለኝ (4x)</a:t>
+              <a:t>ምልክት አለኝ 4x ልዩነት አለኝ 4x</a:t>
             </a:r>
           </a:p>
         </p:txBody>
